--- a/docs/presentations/access-tracking-intro/deck.pptx
+++ b/docs/presentations/access-tracking-intro/deck.pptx
@@ -3142,7 +3142,7 @@
         <p:spPr>
           <a:xfrm>
             <a:off x="812800" y="6238280"/>
-            <a:ext cx="9941560" cy="238720"/>
+            <a:ext cx="9418320" cy="238720"/>
           </a:xfrm>
           <a:prstGeom prst="rect">
             <a:avLst/>
@@ -3185,8 +3185,8 @@
         </p:nvSpPr>
         <p:spPr>
           <a:xfrm>
-            <a:off x="10566400" y="6238280"/>
-            <a:ext cx="812800" cy="238720"/>
+            <a:off x="10058400" y="6210300"/>
+            <a:ext cx="1320800" cy="292100"/>
           </a:xfrm>
           <a:prstGeom prst="rect">
             <a:avLst/>
@@ -3202,22 +3202,22 @@
           <a:p>
             <a:pPr algn="r" indent="0" marL="0">
               <a:lnSpc>
-                <a:spcPts val="1680"/>
-              </a:lnSpc>
-              <a:buNone/>
-            </a:pPr>
-            <a:r>
-              <a:rPr lang="en-US" sz="1200" dirty="0">
-                <a:solidFill>
-                  <a:srgbClr val="5F6A77"/>
-                </a:solidFill>
-                <a:latin typeface="Arial" pitchFamily="34" charset="0"/>
-                <a:ea typeface="Arial" pitchFamily="34" charset="-122"/>
-                <a:cs typeface="Arial" pitchFamily="34" charset="-120"/>
-              </a:rPr>
-              <a:t>10</a:t>
-            </a:r>
-            <a:endParaRPr lang="en-US" sz="1200" dirty="0"/>
+                <a:spcPts val="2100"/>
+              </a:lnSpc>
+              <a:buNone/>
+            </a:pPr>
+            <a:r>
+              <a:rPr lang="en-US" sz="1500" b="1" dirty="0">
+                <a:solidFill>
+                  <a:srgbClr val="3E4A57"/>
+                </a:solidFill>
+                <a:latin typeface="Arial" pitchFamily="34" charset="0"/>
+                <a:ea typeface="Arial" pitchFamily="34" charset="-122"/>
+                <a:cs typeface="Arial" pitchFamily="34" charset="-120"/>
+              </a:rPr>
+              <a:t>10 / 19</a:t>
+            </a:r>
+            <a:endParaRPr lang="en-US" sz="1500" dirty="0"/>
           </a:p>
         </p:txBody>
       </p:sp>
@@ -3393,8 +3393,8 @@
         </p:nvSpPr>
         <p:spPr>
           <a:xfrm>
-            <a:off x="10566400" y="6238280"/>
-            <a:ext cx="812800" cy="238720"/>
+            <a:off x="10058400" y="6210300"/>
+            <a:ext cx="1320800" cy="292100"/>
           </a:xfrm>
           <a:prstGeom prst="rect">
             <a:avLst/>
@@ -3410,22 +3410,22 @@
           <a:p>
             <a:pPr algn="r" indent="0" marL="0">
               <a:lnSpc>
-                <a:spcPts val="1680"/>
-              </a:lnSpc>
-              <a:buNone/>
-            </a:pPr>
-            <a:r>
-              <a:rPr lang="en-US" sz="1200" dirty="0">
-                <a:solidFill>
-                  <a:srgbClr val="9AA5B3"/>
-                </a:solidFill>
-                <a:latin typeface="Arial" pitchFamily="34" charset="0"/>
-                <a:ea typeface="Arial" pitchFamily="34" charset="-122"/>
-                <a:cs typeface="Arial" pitchFamily="34" charset="-120"/>
-              </a:rPr>
-              <a:t>11</a:t>
-            </a:r>
-            <a:endParaRPr lang="en-US" sz="1200" dirty="0"/>
+                <a:spcPts val="2100"/>
+              </a:lnSpc>
+              <a:buNone/>
+            </a:pPr>
+            <a:r>
+              <a:rPr lang="en-US" sz="1500" b="1" dirty="0">
+                <a:solidFill>
+                  <a:srgbClr val="E5E9EF"/>
+                </a:solidFill>
+                <a:latin typeface="Arial" pitchFamily="34" charset="0"/>
+                <a:ea typeface="Arial" pitchFamily="34" charset="-122"/>
+                <a:cs typeface="Arial" pitchFamily="34" charset="-120"/>
+              </a:rPr>
+              <a:t>11 / 19</a:t>
+            </a:r>
+            <a:endParaRPr lang="en-US" sz="1500" dirty="0"/>
           </a:p>
         </p:txBody>
       </p:sp>
@@ -4690,7 +4690,7 @@
         <p:spPr>
           <a:xfrm>
             <a:off x="812800" y="6238280"/>
-            <a:ext cx="9941560" cy="238720"/>
+            <a:ext cx="9418320" cy="238720"/>
           </a:xfrm>
           <a:prstGeom prst="rect">
             <a:avLst/>
@@ -4733,8 +4733,8 @@
         </p:nvSpPr>
         <p:spPr>
           <a:xfrm>
-            <a:off x="10566400" y="6238280"/>
-            <a:ext cx="812800" cy="238720"/>
+            <a:off x="10058400" y="6210300"/>
+            <a:ext cx="1320800" cy="292100"/>
           </a:xfrm>
           <a:prstGeom prst="rect">
             <a:avLst/>
@@ -4750,22 +4750,22 @@
           <a:p>
             <a:pPr algn="r" indent="0" marL="0">
               <a:lnSpc>
-                <a:spcPts val="1680"/>
-              </a:lnSpc>
-              <a:buNone/>
-            </a:pPr>
-            <a:r>
-              <a:rPr lang="en-US" sz="1200" dirty="0">
-                <a:solidFill>
-                  <a:srgbClr val="5F6A77"/>
-                </a:solidFill>
-                <a:latin typeface="Arial" pitchFamily="34" charset="0"/>
-                <a:ea typeface="Arial" pitchFamily="34" charset="-122"/>
-                <a:cs typeface="Arial" pitchFamily="34" charset="-120"/>
-              </a:rPr>
-              <a:t>12</a:t>
-            </a:r>
-            <a:endParaRPr lang="en-US" sz="1200" dirty="0"/>
+                <a:spcPts val="2100"/>
+              </a:lnSpc>
+              <a:buNone/>
+            </a:pPr>
+            <a:r>
+              <a:rPr lang="en-US" sz="1500" b="1" dirty="0">
+                <a:solidFill>
+                  <a:srgbClr val="3E4A57"/>
+                </a:solidFill>
+                <a:latin typeface="Arial" pitchFamily="34" charset="0"/>
+                <a:ea typeface="Arial" pitchFamily="34" charset="-122"/>
+                <a:cs typeface="Arial" pitchFamily="34" charset="-120"/>
+              </a:rPr>
+              <a:t>12 / 19</a:t>
+            </a:r>
+            <a:endParaRPr lang="en-US" sz="1500" dirty="0"/>
           </a:p>
         </p:txBody>
       </p:sp>
@@ -4969,7 +4969,7 @@
         <p:spPr>
           <a:xfrm>
             <a:off x="812800" y="6238280"/>
-            <a:ext cx="9941560" cy="238720"/>
+            <a:ext cx="9418320" cy="238720"/>
           </a:xfrm>
           <a:prstGeom prst="rect">
             <a:avLst/>
@@ -5012,8 +5012,8 @@
         </p:nvSpPr>
         <p:spPr>
           <a:xfrm>
-            <a:off x="10566400" y="6238280"/>
-            <a:ext cx="812800" cy="238720"/>
+            <a:off x="10058400" y="6210300"/>
+            <a:ext cx="1320800" cy="292100"/>
           </a:xfrm>
           <a:prstGeom prst="rect">
             <a:avLst/>
@@ -5029,22 +5029,22 @@
           <a:p>
             <a:pPr algn="r" indent="0" marL="0">
               <a:lnSpc>
-                <a:spcPts val="1680"/>
-              </a:lnSpc>
-              <a:buNone/>
-            </a:pPr>
-            <a:r>
-              <a:rPr lang="en-US" sz="1200" dirty="0">
-                <a:solidFill>
-                  <a:srgbClr val="5F6A77"/>
-                </a:solidFill>
-                <a:latin typeface="Arial" pitchFamily="34" charset="0"/>
-                <a:ea typeface="Arial" pitchFamily="34" charset="-122"/>
-                <a:cs typeface="Arial" pitchFamily="34" charset="-120"/>
-              </a:rPr>
-              <a:t>13</a:t>
-            </a:r>
-            <a:endParaRPr lang="en-US" sz="1200" dirty="0"/>
+                <a:spcPts val="2100"/>
+              </a:lnSpc>
+              <a:buNone/>
+            </a:pPr>
+            <a:r>
+              <a:rPr lang="en-US" sz="1500" b="1" dirty="0">
+                <a:solidFill>
+                  <a:srgbClr val="3E4A57"/>
+                </a:solidFill>
+                <a:latin typeface="Arial" pitchFamily="34" charset="0"/>
+                <a:ea typeface="Arial" pitchFamily="34" charset="-122"/>
+                <a:cs typeface="Arial" pitchFamily="34" charset="-120"/>
+              </a:rPr>
+              <a:t>13 / 19</a:t>
+            </a:r>
+            <a:endParaRPr lang="en-US" sz="1500" dirty="0"/>
           </a:p>
         </p:txBody>
       </p:sp>
@@ -5248,7 +5248,7 @@
         <p:spPr>
           <a:xfrm>
             <a:off x="812800" y="6238280"/>
-            <a:ext cx="9941560" cy="238720"/>
+            <a:ext cx="9418320" cy="238720"/>
           </a:xfrm>
           <a:prstGeom prst="rect">
             <a:avLst/>
@@ -5291,8 +5291,8 @@
         </p:nvSpPr>
         <p:spPr>
           <a:xfrm>
-            <a:off x="10566400" y="6238280"/>
-            <a:ext cx="812800" cy="238720"/>
+            <a:off x="10058400" y="6210300"/>
+            <a:ext cx="1320800" cy="292100"/>
           </a:xfrm>
           <a:prstGeom prst="rect">
             <a:avLst/>
@@ -5308,22 +5308,22 @@
           <a:p>
             <a:pPr algn="r" indent="0" marL="0">
               <a:lnSpc>
-                <a:spcPts val="1680"/>
-              </a:lnSpc>
-              <a:buNone/>
-            </a:pPr>
-            <a:r>
-              <a:rPr lang="en-US" sz="1200" dirty="0">
-                <a:solidFill>
-                  <a:srgbClr val="5F6A77"/>
-                </a:solidFill>
-                <a:latin typeface="Arial" pitchFamily="34" charset="0"/>
-                <a:ea typeface="Arial" pitchFamily="34" charset="-122"/>
-                <a:cs typeface="Arial" pitchFamily="34" charset="-120"/>
-              </a:rPr>
-              <a:t>14</a:t>
-            </a:r>
-            <a:endParaRPr lang="en-US" sz="1200" dirty="0"/>
+                <a:spcPts val="2100"/>
+              </a:lnSpc>
+              <a:buNone/>
+            </a:pPr>
+            <a:r>
+              <a:rPr lang="en-US" sz="1500" b="1" dirty="0">
+                <a:solidFill>
+                  <a:srgbClr val="3E4A57"/>
+                </a:solidFill>
+                <a:latin typeface="Arial" pitchFamily="34" charset="0"/>
+                <a:ea typeface="Arial" pitchFamily="34" charset="-122"/>
+                <a:cs typeface="Arial" pitchFamily="34" charset="-120"/>
+              </a:rPr>
+              <a:t>14 / 19</a:t>
+            </a:r>
+            <a:endParaRPr lang="en-US" sz="1500" dirty="0"/>
           </a:p>
         </p:txBody>
       </p:sp>
@@ -5527,7 +5527,7 @@
         <p:spPr>
           <a:xfrm>
             <a:off x="812800" y="6238280"/>
-            <a:ext cx="9941560" cy="238720"/>
+            <a:ext cx="9418320" cy="238720"/>
           </a:xfrm>
           <a:prstGeom prst="rect">
             <a:avLst/>
@@ -5570,8 +5570,8 @@
         </p:nvSpPr>
         <p:spPr>
           <a:xfrm>
-            <a:off x="10566400" y="6238280"/>
-            <a:ext cx="812800" cy="238720"/>
+            <a:off x="10058400" y="6210300"/>
+            <a:ext cx="1320800" cy="292100"/>
           </a:xfrm>
           <a:prstGeom prst="rect">
             <a:avLst/>
@@ -5587,22 +5587,22 @@
           <a:p>
             <a:pPr algn="r" indent="0" marL="0">
               <a:lnSpc>
-                <a:spcPts val="1680"/>
-              </a:lnSpc>
-              <a:buNone/>
-            </a:pPr>
-            <a:r>
-              <a:rPr lang="en-US" sz="1200" dirty="0">
-                <a:solidFill>
-                  <a:srgbClr val="5F6A77"/>
-                </a:solidFill>
-                <a:latin typeface="Arial" pitchFamily="34" charset="0"/>
-                <a:ea typeface="Arial" pitchFamily="34" charset="-122"/>
-                <a:cs typeface="Arial" pitchFamily="34" charset="-120"/>
-              </a:rPr>
-              <a:t>15</a:t>
-            </a:r>
-            <a:endParaRPr lang="en-US" sz="1200" dirty="0"/>
+                <a:spcPts val="2100"/>
+              </a:lnSpc>
+              <a:buNone/>
+            </a:pPr>
+            <a:r>
+              <a:rPr lang="en-US" sz="1500" b="1" dirty="0">
+                <a:solidFill>
+                  <a:srgbClr val="3E4A57"/>
+                </a:solidFill>
+                <a:latin typeface="Arial" pitchFamily="34" charset="0"/>
+                <a:ea typeface="Arial" pitchFamily="34" charset="-122"/>
+                <a:cs typeface="Arial" pitchFamily="34" charset="-120"/>
+              </a:rPr>
+              <a:t>15 / 19</a:t>
+            </a:r>
+            <a:endParaRPr lang="en-US" sz="1500" dirty="0"/>
           </a:p>
         </p:txBody>
       </p:sp>
@@ -5806,7 +5806,7 @@
         <p:spPr>
           <a:xfrm>
             <a:off x="812800" y="6238280"/>
-            <a:ext cx="9941560" cy="238720"/>
+            <a:ext cx="9418320" cy="238720"/>
           </a:xfrm>
           <a:prstGeom prst="rect">
             <a:avLst/>
@@ -5849,8 +5849,8 @@
         </p:nvSpPr>
         <p:spPr>
           <a:xfrm>
-            <a:off x="10566400" y="6238280"/>
-            <a:ext cx="812800" cy="238720"/>
+            <a:off x="10058400" y="6210300"/>
+            <a:ext cx="1320800" cy="292100"/>
           </a:xfrm>
           <a:prstGeom prst="rect">
             <a:avLst/>
@@ -5866,22 +5866,22 @@
           <a:p>
             <a:pPr algn="r" indent="0" marL="0">
               <a:lnSpc>
-                <a:spcPts val="1680"/>
-              </a:lnSpc>
-              <a:buNone/>
-            </a:pPr>
-            <a:r>
-              <a:rPr lang="en-US" sz="1200" dirty="0">
-                <a:solidFill>
-                  <a:srgbClr val="5F6A77"/>
-                </a:solidFill>
-                <a:latin typeface="Arial" pitchFamily="34" charset="0"/>
-                <a:ea typeface="Arial" pitchFamily="34" charset="-122"/>
-                <a:cs typeface="Arial" pitchFamily="34" charset="-120"/>
-              </a:rPr>
-              <a:t>16</a:t>
-            </a:r>
-            <a:endParaRPr lang="en-US" sz="1200" dirty="0"/>
+                <a:spcPts val="2100"/>
+              </a:lnSpc>
+              <a:buNone/>
+            </a:pPr>
+            <a:r>
+              <a:rPr lang="en-US" sz="1500" b="1" dirty="0">
+                <a:solidFill>
+                  <a:srgbClr val="3E4A57"/>
+                </a:solidFill>
+                <a:latin typeface="Arial" pitchFamily="34" charset="0"/>
+                <a:ea typeface="Arial" pitchFamily="34" charset="-122"/>
+                <a:cs typeface="Arial" pitchFamily="34" charset="-120"/>
+              </a:rPr>
+              <a:t>16 / 19</a:t>
+            </a:r>
+            <a:endParaRPr lang="en-US" sz="1500" dirty="0"/>
           </a:p>
         </p:txBody>
       </p:sp>
@@ -6354,7 +6354,7 @@
         <p:spPr>
           <a:xfrm>
             <a:off x="812800" y="6238280"/>
-            <a:ext cx="9941560" cy="238720"/>
+            <a:ext cx="9418320" cy="238720"/>
           </a:xfrm>
           <a:prstGeom prst="rect">
             <a:avLst/>
@@ -6397,8 +6397,8 @@
         </p:nvSpPr>
         <p:spPr>
           <a:xfrm>
-            <a:off x="10566400" y="6238280"/>
-            <a:ext cx="812800" cy="238720"/>
+            <a:off x="10058400" y="6210300"/>
+            <a:ext cx="1320800" cy="292100"/>
           </a:xfrm>
           <a:prstGeom prst="rect">
             <a:avLst/>
@@ -6414,22 +6414,22 @@
           <a:p>
             <a:pPr algn="r" indent="0" marL="0">
               <a:lnSpc>
-                <a:spcPts val="1680"/>
-              </a:lnSpc>
-              <a:buNone/>
-            </a:pPr>
-            <a:r>
-              <a:rPr lang="en-US" sz="1200" dirty="0">
-                <a:solidFill>
-                  <a:srgbClr val="5F6A77"/>
-                </a:solidFill>
-                <a:latin typeface="Arial" pitchFamily="34" charset="0"/>
-                <a:ea typeface="Arial" pitchFamily="34" charset="-122"/>
-                <a:cs typeface="Arial" pitchFamily="34" charset="-120"/>
-              </a:rPr>
-              <a:t>17</a:t>
-            </a:r>
-            <a:endParaRPr lang="en-US" sz="1200" dirty="0"/>
+                <a:spcPts val="2100"/>
+              </a:lnSpc>
+              <a:buNone/>
+            </a:pPr>
+            <a:r>
+              <a:rPr lang="en-US" sz="1500" b="1" dirty="0">
+                <a:solidFill>
+                  <a:srgbClr val="3E4A57"/>
+                </a:solidFill>
+                <a:latin typeface="Arial" pitchFamily="34" charset="0"/>
+                <a:ea typeface="Arial" pitchFamily="34" charset="-122"/>
+                <a:cs typeface="Arial" pitchFamily="34" charset="-120"/>
+              </a:rPr>
+              <a:t>17 / 19</a:t>
+            </a:r>
+            <a:endParaRPr lang="en-US" sz="1500" dirty="0"/>
           </a:p>
         </p:txBody>
       </p:sp>
@@ -7546,7 +7546,7 @@
         <p:spPr>
           <a:xfrm>
             <a:off x="812800" y="6238280"/>
-            <a:ext cx="9941560" cy="238720"/>
+            <a:ext cx="9418320" cy="238720"/>
           </a:xfrm>
           <a:prstGeom prst="rect">
             <a:avLst/>
@@ -7589,8 +7589,8 @@
         </p:nvSpPr>
         <p:spPr>
           <a:xfrm>
-            <a:off x="10566400" y="6238280"/>
-            <a:ext cx="812800" cy="238720"/>
+            <a:off x="10058400" y="6210300"/>
+            <a:ext cx="1320800" cy="292100"/>
           </a:xfrm>
           <a:prstGeom prst="rect">
             <a:avLst/>
@@ -7606,22 +7606,22 @@
           <a:p>
             <a:pPr algn="r" indent="0" marL="0">
               <a:lnSpc>
-                <a:spcPts val="1680"/>
-              </a:lnSpc>
-              <a:buNone/>
-            </a:pPr>
-            <a:r>
-              <a:rPr lang="en-US" sz="1200" dirty="0">
-                <a:solidFill>
-                  <a:srgbClr val="5F6A77"/>
-                </a:solidFill>
-                <a:latin typeface="Arial" pitchFamily="34" charset="0"/>
-                <a:ea typeface="Arial" pitchFamily="34" charset="-122"/>
-                <a:cs typeface="Arial" pitchFamily="34" charset="-120"/>
-              </a:rPr>
-              <a:t>18</a:t>
-            </a:r>
-            <a:endParaRPr lang="en-US" sz="1200" dirty="0"/>
+                <a:spcPts val="2100"/>
+              </a:lnSpc>
+              <a:buNone/>
+            </a:pPr>
+            <a:r>
+              <a:rPr lang="en-US" sz="1500" b="1" dirty="0">
+                <a:solidFill>
+                  <a:srgbClr val="3E4A57"/>
+                </a:solidFill>
+                <a:latin typeface="Arial" pitchFamily="34" charset="0"/>
+                <a:ea typeface="Arial" pitchFamily="34" charset="-122"/>
+                <a:cs typeface="Arial" pitchFamily="34" charset="-120"/>
+              </a:rPr>
+              <a:t>18 / 19</a:t>
+            </a:r>
+            <a:endParaRPr lang="en-US" sz="1500" dirty="0"/>
           </a:p>
         </p:txBody>
       </p:sp>
@@ -8106,7 +8106,7 @@
         <p:spPr>
           <a:xfrm>
             <a:off x="812800" y="6238280"/>
-            <a:ext cx="9941560" cy="238720"/>
+            <a:ext cx="9418320" cy="238720"/>
           </a:xfrm>
           <a:prstGeom prst="rect">
             <a:avLst/>
@@ -8149,8 +8149,8 @@
         </p:nvSpPr>
         <p:spPr>
           <a:xfrm>
-            <a:off x="10566400" y="6238280"/>
-            <a:ext cx="812800" cy="238720"/>
+            <a:off x="10058400" y="6210300"/>
+            <a:ext cx="1320800" cy="292100"/>
           </a:xfrm>
           <a:prstGeom prst="rect">
             <a:avLst/>
@@ -8166,22 +8166,22 @@
           <a:p>
             <a:pPr algn="r" indent="0" marL="0">
               <a:lnSpc>
-                <a:spcPts val="1680"/>
-              </a:lnSpc>
-              <a:buNone/>
-            </a:pPr>
-            <a:r>
-              <a:rPr lang="en-US" sz="1200" dirty="0">
-                <a:solidFill>
-                  <a:srgbClr val="5F6A77"/>
-                </a:solidFill>
-                <a:latin typeface="Arial" pitchFamily="34" charset="0"/>
-                <a:ea typeface="Arial" pitchFamily="34" charset="-122"/>
-                <a:cs typeface="Arial" pitchFamily="34" charset="-120"/>
-              </a:rPr>
-              <a:t>19</a:t>
-            </a:r>
-            <a:endParaRPr lang="en-US" sz="1200" dirty="0"/>
+                <a:spcPts val="2100"/>
+              </a:lnSpc>
+              <a:buNone/>
+            </a:pPr>
+            <a:r>
+              <a:rPr lang="en-US" sz="1500" b="1" dirty="0">
+                <a:solidFill>
+                  <a:srgbClr val="3E4A57"/>
+                </a:solidFill>
+                <a:latin typeface="Arial" pitchFamily="34" charset="0"/>
+                <a:ea typeface="Arial" pitchFamily="34" charset="-122"/>
+                <a:cs typeface="Arial" pitchFamily="34" charset="-120"/>
+              </a:rPr>
+              <a:t>19 / 19</a:t>
+            </a:r>
+            <a:endParaRPr lang="en-US" sz="1500" dirty="0"/>
           </a:p>
         </p:txBody>
       </p:sp>
@@ -9071,7 +9071,7 @@
         <p:spPr>
           <a:xfrm>
             <a:off x="812800" y="6238280"/>
-            <a:ext cx="9941560" cy="238720"/>
+            <a:ext cx="9418320" cy="238720"/>
           </a:xfrm>
           <a:prstGeom prst="rect">
             <a:avLst/>
@@ -9114,8 +9114,8 @@
         </p:nvSpPr>
         <p:spPr>
           <a:xfrm>
-            <a:off x="10566400" y="6238280"/>
-            <a:ext cx="812800" cy="238720"/>
+            <a:off x="10058400" y="6210300"/>
+            <a:ext cx="1320800" cy="292100"/>
           </a:xfrm>
           <a:prstGeom prst="rect">
             <a:avLst/>
@@ -9131,22 +9131,22 @@
           <a:p>
             <a:pPr algn="r" indent="0" marL="0">
               <a:lnSpc>
-                <a:spcPts val="1680"/>
-              </a:lnSpc>
-              <a:buNone/>
-            </a:pPr>
-            <a:r>
-              <a:rPr lang="en-US" sz="1200" dirty="0">
-                <a:solidFill>
-                  <a:srgbClr val="5F6A77"/>
-                </a:solidFill>
-                <a:latin typeface="Arial" pitchFamily="34" charset="0"/>
-                <a:ea typeface="Arial" pitchFamily="34" charset="-122"/>
-                <a:cs typeface="Arial" pitchFamily="34" charset="-120"/>
-              </a:rPr>
-              <a:t>2</a:t>
-            </a:r>
-            <a:endParaRPr lang="en-US" sz="1200" dirty="0"/>
+                <a:spcPts val="2100"/>
+              </a:lnSpc>
+              <a:buNone/>
+            </a:pPr>
+            <a:r>
+              <a:rPr lang="en-US" sz="1500" b="1" dirty="0">
+                <a:solidFill>
+                  <a:srgbClr val="3E4A57"/>
+                </a:solidFill>
+                <a:latin typeface="Arial" pitchFamily="34" charset="0"/>
+                <a:ea typeface="Arial" pitchFamily="34" charset="-122"/>
+                <a:cs typeface="Arial" pitchFamily="34" charset="-120"/>
+              </a:rPr>
+              <a:t>2 / 19</a:t>
+            </a:r>
+            <a:endParaRPr lang="en-US" sz="1500" dirty="0"/>
           </a:p>
         </p:txBody>
       </p:sp>
@@ -9649,7 +9649,7 @@
         <p:spPr>
           <a:xfrm>
             <a:off x="812800" y="6238280"/>
-            <a:ext cx="9941560" cy="238720"/>
+            <a:ext cx="9418320" cy="238720"/>
           </a:xfrm>
           <a:prstGeom prst="rect">
             <a:avLst/>
@@ -9692,8 +9692,8 @@
         </p:nvSpPr>
         <p:spPr>
           <a:xfrm>
-            <a:off x="10566400" y="6238280"/>
-            <a:ext cx="812800" cy="238720"/>
+            <a:off x="10058400" y="6210300"/>
+            <a:ext cx="1320800" cy="292100"/>
           </a:xfrm>
           <a:prstGeom prst="rect">
             <a:avLst/>
@@ -9709,22 +9709,22 @@
           <a:p>
             <a:pPr algn="r" indent="0" marL="0">
               <a:lnSpc>
-                <a:spcPts val="1680"/>
-              </a:lnSpc>
-              <a:buNone/>
-            </a:pPr>
-            <a:r>
-              <a:rPr lang="en-US" sz="1200" dirty="0">
-                <a:solidFill>
-                  <a:srgbClr val="5F6A77"/>
-                </a:solidFill>
-                <a:latin typeface="Arial" pitchFamily="34" charset="0"/>
-                <a:ea typeface="Arial" pitchFamily="34" charset="-122"/>
-                <a:cs typeface="Arial" pitchFamily="34" charset="-120"/>
-              </a:rPr>
-              <a:t>3</a:t>
-            </a:r>
-            <a:endParaRPr lang="en-US" sz="1200" dirty="0"/>
+                <a:spcPts val="2100"/>
+              </a:lnSpc>
+              <a:buNone/>
+            </a:pPr>
+            <a:r>
+              <a:rPr lang="en-US" sz="1500" b="1" dirty="0">
+                <a:solidFill>
+                  <a:srgbClr val="3E4A57"/>
+                </a:solidFill>
+                <a:latin typeface="Arial" pitchFamily="34" charset="0"/>
+                <a:ea typeface="Arial" pitchFamily="34" charset="-122"/>
+                <a:cs typeface="Arial" pitchFamily="34" charset="-120"/>
+              </a:rPr>
+              <a:t>3 / 19</a:t>
+            </a:r>
+            <a:endParaRPr lang="en-US" sz="1500" dirty="0"/>
           </a:p>
         </p:txBody>
       </p:sp>
@@ -10509,7 +10509,7 @@
         <p:spPr>
           <a:xfrm>
             <a:off x="812800" y="6238280"/>
-            <a:ext cx="9941560" cy="238720"/>
+            <a:ext cx="9418320" cy="238720"/>
           </a:xfrm>
           <a:prstGeom prst="rect">
             <a:avLst/>
@@ -10552,8 +10552,8 @@
         </p:nvSpPr>
         <p:spPr>
           <a:xfrm>
-            <a:off x="10566400" y="6238280"/>
-            <a:ext cx="812800" cy="238720"/>
+            <a:off x="10058400" y="6210300"/>
+            <a:ext cx="1320800" cy="292100"/>
           </a:xfrm>
           <a:prstGeom prst="rect">
             <a:avLst/>
@@ -10569,22 +10569,22 @@
           <a:p>
             <a:pPr algn="r" indent="0" marL="0">
               <a:lnSpc>
-                <a:spcPts val="1680"/>
-              </a:lnSpc>
-              <a:buNone/>
-            </a:pPr>
-            <a:r>
-              <a:rPr lang="en-US" sz="1200" dirty="0">
-                <a:solidFill>
-                  <a:srgbClr val="5F6A77"/>
-                </a:solidFill>
-                <a:latin typeface="Arial" pitchFamily="34" charset="0"/>
-                <a:ea typeface="Arial" pitchFamily="34" charset="-122"/>
-                <a:cs typeface="Arial" pitchFamily="34" charset="-120"/>
-              </a:rPr>
-              <a:t>4</a:t>
-            </a:r>
-            <a:endParaRPr lang="en-US" sz="1200" dirty="0"/>
+                <a:spcPts val="2100"/>
+              </a:lnSpc>
+              <a:buNone/>
+            </a:pPr>
+            <a:r>
+              <a:rPr lang="en-US" sz="1500" b="1" dirty="0">
+                <a:solidFill>
+                  <a:srgbClr val="3E4A57"/>
+                </a:solidFill>
+                <a:latin typeface="Arial" pitchFamily="34" charset="0"/>
+                <a:ea typeface="Arial" pitchFamily="34" charset="-122"/>
+                <a:cs typeface="Arial" pitchFamily="34" charset="-120"/>
+              </a:rPr>
+              <a:t>4 / 19</a:t>
+            </a:r>
+            <a:endParaRPr lang="en-US" sz="1500" dirty="0"/>
           </a:p>
         </p:txBody>
       </p:sp>
@@ -11001,7 +11001,7 @@
         <p:spPr>
           <a:xfrm>
             <a:off x="812800" y="6238280"/>
-            <a:ext cx="9941560" cy="238720"/>
+            <a:ext cx="9418320" cy="238720"/>
           </a:xfrm>
           <a:prstGeom prst="rect">
             <a:avLst/>
@@ -11044,8 +11044,8 @@
         </p:nvSpPr>
         <p:spPr>
           <a:xfrm>
-            <a:off x="10566400" y="6238280"/>
-            <a:ext cx="812800" cy="238720"/>
+            <a:off x="10058400" y="6210300"/>
+            <a:ext cx="1320800" cy="292100"/>
           </a:xfrm>
           <a:prstGeom prst="rect">
             <a:avLst/>
@@ -11061,22 +11061,22 @@
           <a:p>
             <a:pPr algn="r" indent="0" marL="0">
               <a:lnSpc>
-                <a:spcPts val="1680"/>
-              </a:lnSpc>
-              <a:buNone/>
-            </a:pPr>
-            <a:r>
-              <a:rPr lang="en-US" sz="1200" dirty="0">
-                <a:solidFill>
-                  <a:srgbClr val="5F6A77"/>
-                </a:solidFill>
-                <a:latin typeface="Arial" pitchFamily="34" charset="0"/>
-                <a:ea typeface="Arial" pitchFamily="34" charset="-122"/>
-                <a:cs typeface="Arial" pitchFamily="34" charset="-120"/>
-              </a:rPr>
-              <a:t>5</a:t>
-            </a:r>
-            <a:endParaRPr lang="en-US" sz="1200" dirty="0"/>
+                <a:spcPts val="2100"/>
+              </a:lnSpc>
+              <a:buNone/>
+            </a:pPr>
+            <a:r>
+              <a:rPr lang="en-US" sz="1500" b="1" dirty="0">
+                <a:solidFill>
+                  <a:srgbClr val="3E4A57"/>
+                </a:solidFill>
+                <a:latin typeface="Arial" pitchFamily="34" charset="0"/>
+                <a:ea typeface="Arial" pitchFamily="34" charset="-122"/>
+                <a:cs typeface="Arial" pitchFamily="34" charset="-120"/>
+              </a:rPr>
+              <a:t>5 / 19</a:t>
+            </a:r>
+            <a:endParaRPr lang="en-US" sz="1500" dirty="0"/>
           </a:p>
         </p:txBody>
       </p:sp>
@@ -11515,7 +11515,7 @@
         <p:spPr>
           <a:xfrm>
             <a:off x="812800" y="6238280"/>
-            <a:ext cx="9941560" cy="238720"/>
+            <a:ext cx="9418320" cy="238720"/>
           </a:xfrm>
           <a:prstGeom prst="rect">
             <a:avLst/>
@@ -11558,8 +11558,8 @@
         </p:nvSpPr>
         <p:spPr>
           <a:xfrm>
-            <a:off x="10566400" y="6238280"/>
-            <a:ext cx="812800" cy="238720"/>
+            <a:off x="10058400" y="6210300"/>
+            <a:ext cx="1320800" cy="292100"/>
           </a:xfrm>
           <a:prstGeom prst="rect">
             <a:avLst/>
@@ -11575,22 +11575,22 @@
           <a:p>
             <a:pPr algn="r" indent="0" marL="0">
               <a:lnSpc>
-                <a:spcPts val="1680"/>
-              </a:lnSpc>
-              <a:buNone/>
-            </a:pPr>
-            <a:r>
-              <a:rPr lang="en-US" sz="1200" dirty="0">
-                <a:solidFill>
-                  <a:srgbClr val="5F6A77"/>
-                </a:solidFill>
-                <a:latin typeface="Arial" pitchFamily="34" charset="0"/>
-                <a:ea typeface="Arial" pitchFamily="34" charset="-122"/>
-                <a:cs typeface="Arial" pitchFamily="34" charset="-120"/>
-              </a:rPr>
-              <a:t>6</a:t>
-            </a:r>
-            <a:endParaRPr lang="en-US" sz="1200" dirty="0"/>
+                <a:spcPts val="2100"/>
+              </a:lnSpc>
+              <a:buNone/>
+            </a:pPr>
+            <a:r>
+              <a:rPr lang="en-US" sz="1500" b="1" dirty="0">
+                <a:solidFill>
+                  <a:srgbClr val="3E4A57"/>
+                </a:solidFill>
+                <a:latin typeface="Arial" pitchFamily="34" charset="0"/>
+                <a:ea typeface="Arial" pitchFamily="34" charset="-122"/>
+                <a:cs typeface="Arial" pitchFamily="34" charset="-120"/>
+              </a:rPr>
+              <a:t>6 / 19</a:t>
+            </a:r>
+            <a:endParaRPr lang="en-US" sz="1500" dirty="0"/>
           </a:p>
         </p:txBody>
       </p:sp>
@@ -12063,7 +12063,7 @@
         <p:spPr>
           <a:xfrm>
             <a:off x="812800" y="6238280"/>
-            <a:ext cx="9941560" cy="238720"/>
+            <a:ext cx="9418320" cy="238720"/>
           </a:xfrm>
           <a:prstGeom prst="rect">
             <a:avLst/>
@@ -12106,8 +12106,8 @@
         </p:nvSpPr>
         <p:spPr>
           <a:xfrm>
-            <a:off x="10566400" y="6238280"/>
-            <a:ext cx="812800" cy="238720"/>
+            <a:off x="10058400" y="6210300"/>
+            <a:ext cx="1320800" cy="292100"/>
           </a:xfrm>
           <a:prstGeom prst="rect">
             <a:avLst/>
@@ -12123,22 +12123,22 @@
           <a:p>
             <a:pPr algn="r" indent="0" marL="0">
               <a:lnSpc>
-                <a:spcPts val="1680"/>
-              </a:lnSpc>
-              <a:buNone/>
-            </a:pPr>
-            <a:r>
-              <a:rPr lang="en-US" sz="1200" dirty="0">
-                <a:solidFill>
-                  <a:srgbClr val="5F6A77"/>
-                </a:solidFill>
-                <a:latin typeface="Arial" pitchFamily="34" charset="0"/>
-                <a:ea typeface="Arial" pitchFamily="34" charset="-122"/>
-                <a:cs typeface="Arial" pitchFamily="34" charset="-120"/>
-              </a:rPr>
-              <a:t>7</a:t>
-            </a:r>
-            <a:endParaRPr lang="en-US" sz="1200" dirty="0"/>
+                <a:spcPts val="2100"/>
+              </a:lnSpc>
+              <a:buNone/>
+            </a:pPr>
+            <a:r>
+              <a:rPr lang="en-US" sz="1500" b="1" dirty="0">
+                <a:solidFill>
+                  <a:srgbClr val="3E4A57"/>
+                </a:solidFill>
+                <a:latin typeface="Arial" pitchFamily="34" charset="0"/>
+                <a:ea typeface="Arial" pitchFamily="34" charset="-122"/>
+                <a:cs typeface="Arial" pitchFamily="34" charset="-120"/>
+              </a:rPr>
+              <a:t>7 / 19</a:t>
+            </a:r>
+            <a:endParaRPr lang="en-US" sz="1500" dirty="0"/>
           </a:p>
         </p:txBody>
       </p:sp>
@@ -12609,7 +12609,7 @@
         <p:spPr>
           <a:xfrm>
             <a:off x="812800" y="6238280"/>
-            <a:ext cx="9941560" cy="238720"/>
+            <a:ext cx="9418320" cy="238720"/>
           </a:xfrm>
           <a:prstGeom prst="rect">
             <a:avLst/>
@@ -12652,8 +12652,8 @@
         </p:nvSpPr>
         <p:spPr>
           <a:xfrm>
-            <a:off x="10566400" y="6238280"/>
-            <a:ext cx="812800" cy="238720"/>
+            <a:off x="10058400" y="6210300"/>
+            <a:ext cx="1320800" cy="292100"/>
           </a:xfrm>
           <a:prstGeom prst="rect">
             <a:avLst/>
@@ -12669,22 +12669,22 @@
           <a:p>
             <a:pPr algn="r" indent="0" marL="0">
               <a:lnSpc>
-                <a:spcPts val="1680"/>
-              </a:lnSpc>
-              <a:buNone/>
-            </a:pPr>
-            <a:r>
-              <a:rPr lang="en-US" sz="1200" dirty="0">
-                <a:solidFill>
-                  <a:srgbClr val="5F6A77"/>
-                </a:solidFill>
-                <a:latin typeface="Arial" pitchFamily="34" charset="0"/>
-                <a:ea typeface="Arial" pitchFamily="34" charset="-122"/>
-                <a:cs typeface="Arial" pitchFamily="34" charset="-120"/>
-              </a:rPr>
-              <a:t>8</a:t>
-            </a:r>
-            <a:endParaRPr lang="en-US" sz="1200" dirty="0"/>
+                <a:spcPts val="2100"/>
+              </a:lnSpc>
+              <a:buNone/>
+            </a:pPr>
+            <a:r>
+              <a:rPr lang="en-US" sz="1500" b="1" dirty="0">
+                <a:solidFill>
+                  <a:srgbClr val="3E4A57"/>
+                </a:solidFill>
+                <a:latin typeface="Arial" pitchFamily="34" charset="0"/>
+                <a:ea typeface="Arial" pitchFamily="34" charset="-122"/>
+                <a:cs typeface="Arial" pitchFamily="34" charset="-120"/>
+              </a:rPr>
+              <a:t>8 / 19</a:t>
+            </a:r>
+            <a:endParaRPr lang="en-US" sz="1500" dirty="0"/>
           </a:p>
         </p:txBody>
       </p:sp>
@@ -13156,7 +13156,7 @@
         <p:spPr>
           <a:xfrm>
             <a:off x="812800" y="6238280"/>
-            <a:ext cx="9941560" cy="238720"/>
+            <a:ext cx="9418320" cy="238720"/>
           </a:xfrm>
           <a:prstGeom prst="rect">
             <a:avLst/>
@@ -13199,8 +13199,8 @@
         </p:nvSpPr>
         <p:spPr>
           <a:xfrm>
-            <a:off x="10566400" y="6238280"/>
-            <a:ext cx="812800" cy="238720"/>
+            <a:off x="10058400" y="6210300"/>
+            <a:ext cx="1320800" cy="292100"/>
           </a:xfrm>
           <a:prstGeom prst="rect">
             <a:avLst/>
@@ -13216,22 +13216,22 @@
           <a:p>
             <a:pPr algn="r" indent="0" marL="0">
               <a:lnSpc>
-                <a:spcPts val="1680"/>
-              </a:lnSpc>
-              <a:buNone/>
-            </a:pPr>
-            <a:r>
-              <a:rPr lang="en-US" sz="1200" dirty="0">
-                <a:solidFill>
-                  <a:srgbClr val="5F6A77"/>
-                </a:solidFill>
-                <a:latin typeface="Arial" pitchFamily="34" charset="0"/>
-                <a:ea typeface="Arial" pitchFamily="34" charset="-122"/>
-                <a:cs typeface="Arial" pitchFamily="34" charset="-120"/>
-              </a:rPr>
-              <a:t>9</a:t>
-            </a:r>
-            <a:endParaRPr lang="en-US" sz="1200" dirty="0"/>
+                <a:spcPts val="2100"/>
+              </a:lnSpc>
+              <a:buNone/>
+            </a:pPr>
+            <a:r>
+              <a:rPr lang="en-US" sz="1500" b="1" dirty="0">
+                <a:solidFill>
+                  <a:srgbClr val="3E4A57"/>
+                </a:solidFill>
+                <a:latin typeface="Arial" pitchFamily="34" charset="0"/>
+                <a:ea typeface="Arial" pitchFamily="34" charset="-122"/>
+                <a:cs typeface="Arial" pitchFamily="34" charset="-120"/>
+              </a:rPr>
+              <a:t>9 / 19</a:t>
+            </a:r>
+            <a:endParaRPr lang="en-US" sz="1500" dirty="0"/>
           </a:p>
         </p:txBody>
       </p:sp>

--- a/docs/presentations/access-tracking-intro/deck.pptx
+++ b/docs/presentations/access-tracking-intro/deck.pptx
@@ -967,7 +967,7 @@
           <a:p>
             <a:r>
               <a:rPr lang="en-US" dirty="0"/>
-              <a:t>The dashboard never revokes anything. Revocation happens in LDAP, by the mnemonic owner; GroupSync carries it to OpenShift; the dashboard shows the result.</a:t>
+              <a:t>The dashboard never revokes anything. A group grant is revoked in LDAP by the mnemonic owner and GroupSync carries it to OpenShift; a direct grant is deleted on the cluster; the dashboard shows the result.</a:t>
             </a:r>
             <a:endParaRPr lang="en-US" dirty="0"/>
           </a:p>
@@ -1231,7 +1231,7 @@
           <a:p>
             <a:r>
               <a:rPr lang="en-US" dirty="0"/>
-              <a:t>Switch to the technical audience: tiers, architecture, one poll, reporting, credentials, operations, rollout.</a:t>
+              <a:t>Switch to the technical audience: tiers, architecture, one poll, reporting, credentials, operations, limits, rollout.</a:t>
             </a:r>
             <a:endParaRPr lang="en-US" dirty="0"/>
           </a:p>
@@ -1495,7 +1495,7 @@
           <a:p>
             <a:r>
               <a:rPr lang="en-US" dirty="0"/>
-              <a:t>Part 1 is for leadership and audit, part 2 for the platform team. Stop after part 1 for a non-technical audience.</a:t>
+              <a:t>Part 1 is for leadership and audit, part 2 for the platform team. Stop after part 1 for a non-technical audience; for auditors, show slide 24 (the limits) as well.</a:t>
             </a:r>
             <a:endParaRPr lang="en-US" dirty="0"/>
           </a:p>
@@ -2287,7 +2287,7 @@
           <a:p>
             <a:r>
               <a:rPr lang="en-US" dirty="0"/>
-              <a:t>Close the loop on the problem slide: each failure, as the dashboard reported it on the lab. None of these raised an event on the cluster.</a:t>
+              <a:t>Close the loop on the problem slide: each failure, as the dashboard reported it on the lab. The first two are real bindings on the host cluster; the third comes from the lab’s mock clusters, whose fixture never syncs.</a:t>
             </a:r>
             <a:endParaRPr lang="en-US" dirty="0"/>
           </a:p>
@@ -3971,7 +3971,7 @@
                 <a:ea typeface="Arial" pitchFamily="34" charset="-122"/>
                 <a:cs typeface="Arial" pitchFamily="34" charset="-120"/>
               </a:rPr>
-              <a:t>Every login attempt, read from the cluster's audit log: 779 attempts by 13 distinct users, 18 of them failed.</a:t>
+              <a:t>Login attempts read from the cluster’s OAuth audit log: 13 distinct users made 779 attempts, and 18 failed.</a:t>
             </a:r>
             <a:endParaRPr lang="en-US" sz="1300" dirty="0"/>
           </a:p>
@@ -5613,7 +5613,7 @@
         <p:spPr>
           <a:xfrm>
             <a:off x="990600" y="2639020"/>
-            <a:ext cx="1686520" cy="482600"/>
+            <a:ext cx="1813520" cy="254000"/>
           </a:xfrm>
           <a:prstGeom prst="rect">
             <a:avLst/>
@@ -5642,7 +5642,7 @@
                 <a:ea typeface="Arial" pitchFamily="34" charset="-122"/>
                 <a:cs typeface="Arial" pitchFamily="34" charset="-120"/>
               </a:rPr>
-              <a:t>The schedule runs</a:t>
+              <a:t>The pack is made</a:t>
             </a:r>
             <a:endParaRPr lang="en-US" sz="1500" dirty="0"/>
           </a:p>
@@ -5656,8 +5656,8 @@
         </p:nvSpPr>
         <p:spPr>
           <a:xfrm>
-            <a:off x="990600" y="3172420"/>
-            <a:ext cx="1686520" cy="916781"/>
+            <a:off x="990600" y="2943820"/>
+            <a:ext cx="1686520" cy="1139627"/>
           </a:xfrm>
           <a:prstGeom prst="rect">
             <a:avLst/>
@@ -5686,7 +5686,7 @@
                 <a:ea typeface="Arial" pitchFamily="34" charset="-122"/>
                 <a:cs typeface="Arial" pitchFamily="34" charset="-120"/>
               </a:rPr>
-              <a:t>and makes the certification pack on 1 January, April, July and October.</a:t>
+              <a:t>from Reports at the quarter’s start, with the campaign, the reviewer and the due date.</a:t>
             </a:r>
             <a:endParaRPr lang="en-US" sz="1300" dirty="0"/>
           </a:p>
@@ -6234,7 +6234,7 @@
         <p:spPr>
           <a:xfrm>
             <a:off x="7421860" y="2639020"/>
-            <a:ext cx="1686620" cy="482600"/>
+            <a:ext cx="1813620" cy="254000"/>
           </a:xfrm>
           <a:prstGeom prst="rect">
             <a:avLst/>
@@ -6263,7 +6263,7 @@
                 <a:ea typeface="Arial" pitchFamily="34" charset="-122"/>
                 <a:cs typeface="Arial" pitchFamily="34" charset="-120"/>
               </a:rPr>
-              <a:t>GroupSync prunes</a:t>
+              <a:t>GroupSync syncs</a:t>
             </a:r>
             <a:endParaRPr lang="en-US" sz="1500" dirty="0"/>
           </a:p>
@@ -6277,8 +6277,8 @@
         </p:nvSpPr>
         <p:spPr>
           <a:xfrm>
-            <a:off x="7421860" y="3172420"/>
-            <a:ext cx="1686620" cy="916781"/>
+            <a:off x="7421860" y="2943820"/>
+            <a:ext cx="1686620" cy="1139627"/>
           </a:xfrm>
           <a:prstGeom prst="rect">
             <a:avLst/>
@@ -6307,7 +6307,7 @@
                 <a:ea typeface="Arial" pitchFamily="34" charset="-122"/>
                 <a:cs typeface="Arial" pitchFamily="34" charset="-120"/>
               </a:rPr>
-              <a:t>The operator removes them from the OpenShift group on its next run.</a:t>
+              <a:t>On its next run the operator rewrites the OpenShift group from LDAP, which removes them.</a:t>
             </a:r>
             <a:endParaRPr lang="en-US" sz="1300" dirty="0"/>
           </a:p>
@@ -6485,7 +6485,7 @@
         <p:spPr>
           <a:xfrm>
             <a:off x="9565680" y="3172420"/>
-            <a:ext cx="1686520" cy="693936"/>
+            <a:ext cx="1686520" cy="916781"/>
           </a:xfrm>
           <a:prstGeom prst="rect">
             <a:avLst/>
@@ -6514,7 +6514,7 @@
                 <a:ea typeface="Arial" pitchFamily="34" charset="-122"/>
                 <a:cs typeface="Arial" pitchFamily="34" charset="-120"/>
               </a:rPr>
-              <a:t>on its next poll; the next report diff records the change.</a:t>
+              <a:t>on its next poll; a report diff of the next pack against this one shows the change.</a:t>
             </a:r>
             <a:endParaRPr lang="en-US" sz="1300" dirty="0"/>
           </a:p>
@@ -6529,11 +6529,11 @@
         <p:spPr>
           <a:xfrm>
             <a:off x="812800" y="4495602"/>
-            <a:ext cx="10566400" cy="818455"/>
+            <a:ext cx="10566400" cy="1041301"/>
           </a:xfrm>
           <a:prstGeom prst="roundRect">
             <a:avLst>
-              <a:gd name="adj" fmla="val 9310"/>
+              <a:gd name="adj" fmla="val 7318"/>
             </a:avLst>
           </a:prstGeom>
           <a:solidFill>
@@ -6551,7 +6551,7 @@
         <p:spPr>
           <a:xfrm>
             <a:off x="812800" y="4495602"/>
-            <a:ext cx="10566400" cy="818455"/>
+            <a:ext cx="10566400" cy="1041301"/>
           </a:xfrm>
           <a:custGeom>
             <a:avLst/>
@@ -6560,12 +6560,12 @@
             <a:cxnLst/>
             <a:rect l="l" t="t" r="r" b="b"/>
             <a:pathLst>
-              <a:path w="10566400" h="818455">
+              <a:path w="10566400" h="1041301">
                 <a:moveTo>
-                  <a:pt x="76200" y="818455"/>
+                  <a:pt x="76200" y="1041301"/>
                 </a:moveTo>
                 <a:lnTo>
-                  <a:pt x="76200" y="818455"/>
+                  <a:pt x="76200" y="1041301"/>
                 </a:lnTo>
                 <a:arcTo hR="76200" wR="76200" stAng="5400000" swAng="5400000"/>
                 <a:lnTo>
@@ -6576,7 +6576,7 @@
                   <a:pt x="76200" y="0"/>
                 </a:lnTo>
                 <a:lnTo>
-                  <a:pt x="76200" y="818455"/>
+                  <a:pt x="76200" y="1041301"/>
                 </a:lnTo>
                 <a:close/>
               </a:path>
@@ -6641,7 +6641,7 @@
         <p:spPr>
           <a:xfrm>
             <a:off x="1092200" y="4938812"/>
-            <a:ext cx="10386314" cy="248245"/>
+            <a:ext cx="10386314" cy="471091"/>
           </a:xfrm>
           <a:prstGeom prst="rect">
             <a:avLst/>
@@ -6670,7 +6670,7 @@
                 <a:ea typeface="Arial" pitchFamily="34" charset="-122"/>
                 <a:cs typeface="Arial" pitchFamily="34" charset="-120"/>
               </a:rPr>
-              <a:t>Add the person to the right LDAP group, wait one sync, then delete the direct binding. The Namespace audit lists every one.</a:t>
+              <a:t>Revoked: delete the binding on the cluster. Approved: add the person to the right LDAP group, wait one sync, then delete the binding. The Namespace audit lists every one.</a:t>
             </a:r>
             <a:endParaRPr lang="en-US" sz="1300" dirty="0"/>
           </a:p>
@@ -6714,7 +6714,7 @@
                 <a:ea typeface="Arial" pitchFamily="34" charset="-122"/>
                 <a:cs typeface="Arial" pitchFamily="34" charset="-120"/>
               </a:rPr>
-              <a:t>Sources: reference-architecture.md §1a · the lab's GroupSync CRs (prune on; every 30 min to 2 h) · SPEC_F3 (report diff)</a:t>
+              <a:t>Sources: reference-architecture.md §1a · the certification report · the lab's GroupSync CRs (every 30 min to 2 h) · SPEC_F3</a:t>
             </a:r>
             <a:endParaRPr lang="en-US" sz="1200" dirty="0"/>
           </a:p>
@@ -12637,7 +12637,7 @@
                 <a:ea typeface="Arial" pitchFamily="34" charset="-122"/>
                 <a:cs typeface="Arial" pitchFamily="34" charset="-120"/>
               </a:rPr>
-              <a:t>It changes nothing it reads</a:t>
+              <a:t>It changes no access</a:t>
             </a:r>
             <a:endParaRPr lang="en-US" sz="1500" dirty="0"/>
           </a:p>
@@ -12696,11 +12696,11 @@
         <p:spPr>
           <a:xfrm>
             <a:off x="812800" y="3313311"/>
-            <a:ext cx="5194300" cy="1182291"/>
+            <a:ext cx="5194300" cy="1405136"/>
           </a:xfrm>
           <a:prstGeom prst="roundRect">
             <a:avLst>
-              <a:gd name="adj" fmla="val 6445"/>
+              <a:gd name="adj" fmla="val 5423"/>
             </a:avLst>
           </a:prstGeom>
           <a:solidFill>
@@ -12725,7 +12725,7 @@
         <p:spPr>
           <a:xfrm>
             <a:off x="812800" y="3313311"/>
-            <a:ext cx="5194300" cy="1182291"/>
+            <a:ext cx="5194300" cy="1405136"/>
           </a:xfrm>
           <a:custGeom>
             <a:avLst/>
@@ -12734,7 +12734,7 @@
             <a:cxnLst/>
             <a:rect l="l" t="t" r="r" b="b"/>
             <a:pathLst>
-              <a:path w="5194300" h="1182291">
+              <a:path w="5194300" h="1405136">
                 <a:moveTo>
                   <a:pt x="0" y="76200"/>
                 </a:moveTo>
@@ -12800,7 +12800,7 @@
                 <a:ea typeface="Arial" pitchFamily="34" charset="-122"/>
                 <a:cs typeface="Arial" pitchFamily="34" charset="-120"/>
               </a:rPr>
-              <a:t>Login history starts at capture</a:t>
+              <a:t>Login history has a start</a:t>
             </a:r>
             <a:endParaRPr lang="en-US" sz="1500" dirty="0"/>
           </a:p>
@@ -12815,7 +12815,7 @@
         <p:spPr>
           <a:xfrm>
             <a:off x="990600" y="3872111"/>
-            <a:ext cx="4983861" cy="471091"/>
+            <a:ext cx="4983861" cy="693936"/>
           </a:xfrm>
           <a:prstGeom prst="rect">
             <a:avLst/>
@@ -12844,7 +12844,7 @@
                 <a:ea typeface="Arial" pitchFamily="34" charset="-122"/>
                 <a:cs typeface="Arial" pitchFamily="34" charset="-120"/>
               </a:rPr>
-              <a:t>Logins are recorded from the day capture began; nothing earlier was observed. They are kept 400 days.</a:t>
+              <a:t>Logins go back only to the oldest audit file on the cluster when capture began; nothing earlier was observed. They are kept 400 days.</a:t>
             </a:r>
             <a:endParaRPr lang="en-US" sz="1300" dirty="0"/>
           </a:p>
@@ -12859,11 +12859,11 @@
         <p:spPr>
           <a:xfrm>
             <a:off x="6184900" y="3313311"/>
-            <a:ext cx="5194300" cy="1182291"/>
+            <a:ext cx="5194300" cy="1405136"/>
           </a:xfrm>
           <a:prstGeom prst="roundRect">
             <a:avLst>
-              <a:gd name="adj" fmla="val 6445"/>
+              <a:gd name="adj" fmla="val 5423"/>
             </a:avLst>
           </a:prstGeom>
           <a:solidFill>
@@ -12888,7 +12888,7 @@
         <p:spPr>
           <a:xfrm>
             <a:off x="6184900" y="3313311"/>
-            <a:ext cx="5194300" cy="1182291"/>
+            <a:ext cx="5194300" cy="1405136"/>
           </a:xfrm>
           <a:custGeom>
             <a:avLst/>
@@ -12897,7 +12897,7 @@
             <a:cxnLst/>
             <a:rect l="l" t="t" r="r" b="b"/>
             <a:pathLst>
-              <a:path w="5194300" h="1182291">
+              <a:path w="5194300" h="1405136">
                 <a:moveTo>
                   <a:pt x="0" y="76200"/>
                 </a:moveTo>
@@ -16154,7 +16154,7 @@
         <p:spPr>
           <a:xfrm>
             <a:off x="850900" y="2999581"/>
-            <a:ext cx="0" cy="919361"/>
+            <a:ext cx="0" cy="1125041"/>
           </a:xfrm>
           <a:prstGeom prst="line">
             <a:avLst/>
@@ -16221,7 +16221,7 @@
         <p:spPr>
           <a:xfrm>
             <a:off x="1041400" y="3507581"/>
-            <a:ext cx="3165602" cy="436761"/>
+            <a:ext cx="3165602" cy="642441"/>
           </a:xfrm>
           <a:prstGeom prst="rect">
             <a:avLst/>
@@ -16250,7 +16250,7 @@
                 <a:ea typeface="Arial" pitchFamily="34" charset="-122"/>
                 <a:cs typeface="Arial" pitchFamily="34" charset="-120"/>
               </a:rPr>
-              <a:t>12 direct user grants across 5 namespaces, 3 of them admin or cluster-admin.</a:t>
+              <a:t>12 direct user grants across 5 namespaces, counting the cluster scope as one; 3 of them admin or cluster-admin.</a:t>
             </a:r>
             <a:endParaRPr lang="en-US" sz="1200" dirty="0"/>
           </a:p>
@@ -16264,7 +16264,7 @@
         </p:nvSpPr>
         <p:spPr>
           <a:xfrm>
-            <a:off x="4368800" y="3195737"/>
+            <a:off x="4368800" y="3298527"/>
             <a:ext cx="7010400" cy="527050"/>
           </a:xfrm>
           <a:prstGeom prst="roundRect">
@@ -16294,7 +16294,7 @@
         </p:blipFill>
         <p:spPr>
           <a:xfrm>
-            <a:off x="4455085" y="3202087"/>
+            <a:off x="4455085" y="3304877"/>
             <a:ext cx="6837829" cy="514350"/>
           </a:xfrm>
           <a:prstGeom prst="rect">
@@ -16310,7 +16310,7 @@
         </p:nvSpPr>
         <p:spPr>
           <a:xfrm>
-            <a:off x="4371975" y="3198912"/>
+            <a:off x="4371975" y="3301702"/>
             <a:ext cx="7004050" cy="520700"/>
           </a:xfrm>
           <a:prstGeom prst="roundRect">
@@ -16335,8 +16335,8 @@
         </p:nvSpPr>
         <p:spPr>
           <a:xfrm>
-            <a:off x="850900" y="4097437"/>
-            <a:ext cx="0" cy="919361"/>
+            <a:off x="850900" y="4302423"/>
+            <a:ext cx="0" cy="1125041"/>
           </a:xfrm>
           <a:prstGeom prst="line">
             <a:avLst/>
@@ -16358,7 +16358,7 @@
         </p:nvSpPr>
         <p:spPr>
           <a:xfrm>
-            <a:off x="1041400" y="4097437"/>
+            <a:off x="1041400" y="4302423"/>
             <a:ext cx="3165602" cy="482600"/>
           </a:xfrm>
           <a:prstGeom prst="rect">
@@ -16402,8 +16402,8 @@
         </p:nvSpPr>
         <p:spPr>
           <a:xfrm>
-            <a:off x="1041400" y="4605437"/>
-            <a:ext cx="3165602" cy="436761"/>
+            <a:off x="1041400" y="4810423"/>
+            <a:ext cx="3165602" cy="642441"/>
           </a:xfrm>
           <a:prstGeom prst="rect">
             <a:avLst/>
@@ -16432,7 +16432,7 @@
                 <a:ea typeface="Arial" pitchFamily="34" charset="-122"/>
                 <a:cs typeface="Arial" pitchFamily="34" charset="-120"/>
               </a:rPr>
-              <a:t>ldap-sync overdue on 3 clusters: last sync 24 days before, the schedule has stopped firing.</a:t>
+              <a:t>ldap-sync overdue on the lab’s 3 mock clusters, whose fixture’s last sync is fixed at 2026-09-14: how a stopped schedule shows.</a:t>
             </a:r>
             <a:endParaRPr lang="en-US" sz="1200" dirty="0"/>
           </a:p>
@@ -16446,7 +16446,7 @@
         </p:nvSpPr>
         <p:spPr>
           <a:xfrm>
-            <a:off x="4368800" y="4096742"/>
+            <a:off x="4368800" y="4404519"/>
             <a:ext cx="7010400" cy="920750"/>
           </a:xfrm>
           <a:prstGeom prst="roundRect">
@@ -16475,7 +16475,7 @@
         </p:blipFill>
         <p:spPr>
           <a:xfrm>
-            <a:off x="4375150" y="4103092"/>
+            <a:off x="4375150" y="4410869"/>
             <a:ext cx="6997700" cy="908050"/>
           </a:xfrm>
           <a:prstGeom prst="roundRect">
@@ -16493,7 +16493,7 @@
         </p:nvSpPr>
         <p:spPr>
           <a:xfrm>
-            <a:off x="4371975" y="4099917"/>
+            <a:off x="4371975" y="4407694"/>
             <a:ext cx="7004050" cy="914400"/>
           </a:xfrm>
           <a:prstGeom prst="roundRect">
@@ -18299,7 +18299,7 @@
         <p:spPr>
           <a:xfrm>
             <a:off x="850900" y="3645892"/>
-            <a:ext cx="0" cy="668536"/>
+            <a:ext cx="0" cy="891381"/>
           </a:xfrm>
           <a:prstGeom prst="line">
             <a:avLst/>
@@ -18322,7 +18322,7 @@
         <p:spPr>
           <a:xfrm>
             <a:off x="1041400" y="3645892"/>
-            <a:ext cx="3427222" cy="693936"/>
+            <a:ext cx="3427222" cy="916781"/>
           </a:xfrm>
           <a:prstGeom prst="rect">
             <a:avLst/>
@@ -18351,7 +18351,7 @@
                 <a:ea typeface="Arial" pitchFamily="34" charset="-122"/>
                 <a:cs typeface="Arial" pitchFamily="34" charset="-120"/>
               </a:rPr>
-              <a:t>Each alert says what to check, for example “synced with zero members — check the LDAP-side member DNs resolve”.</a:t>
+              <a:t>Each alert says why it fired, and some say what to check: “synced with zero members — check the LDAP-side member DNs resolve”.</a:t>
             </a:r>
             <a:endParaRPr lang="en-US" sz="1300" dirty="0"/>
           </a:p>
@@ -18467,7 +18467,7 @@
                 <a:ea typeface="Arial" pitchFamily="34" charset="-122"/>
                 <a:cs typeface="Arial" pitchFamily="34" charset="-120"/>
               </a:rPr>
-              <a:t>Screenshot: Overview, light theme, the lab at 5.8.0</a:t>
+              <a:t>Screenshot: Overview, light theme, the lab at 5.8.0, whose six clusters include three mock API servers</a:t>
             </a:r>
             <a:endParaRPr lang="en-US" sz="1200" dirty="0"/>
           </a:p>
@@ -19272,7 +19272,7 @@
         <p:spPr>
           <a:xfrm>
             <a:off x="850900" y="3390503"/>
-            <a:ext cx="0" cy="445691"/>
+            <a:ext cx="0" cy="1114227"/>
           </a:xfrm>
           <a:prstGeom prst="line">
             <a:avLst/>
@@ -19295,7 +19295,7 @@
         <p:spPr>
           <a:xfrm>
             <a:off x="1041400" y="3390503"/>
-            <a:ext cx="3427222" cy="471091"/>
+            <a:ext cx="3427222" cy="1139627"/>
           </a:xfrm>
           <a:prstGeom prst="rect">
             <a:avLst/>
@@ -19324,7 +19324,7 @@
                 <a:ea typeface="Arial" pitchFamily="34" charset="-122"/>
                 <a:cs typeface="Arial" pitchFamily="34" charset="-120"/>
               </a:rPr>
-              <a:t>Under the results, the cluster's totals: 66 groups, 61 users, 128 namespaces.</a:t>
+              <a:t>Under the results, the cluster’s totals: 66 groups, 61 users, 128 namespaces, as an auditor sees them. A self-tier reader searches only their own groups, their user row and the namespaces their grants reach.</a:t>
             </a:r>
             <a:endParaRPr lang="en-US" sz="1300" dirty="0"/>
           </a:p>
